--- a/CYBER360-2.2-2.6-Operators.pptx
+++ b/CYBER360-2.2-2.6-Operators.pptx
@@ -801,7 +801,7 @@
           <a:p>
             <a:fld id="{71087A05-F855-4434-8DDE-39A8542098A6}" type="datetimeFigureOut">
               <a:rPr lang="en-US" smtClean="0"/>
-              <a:t>11/21/2024</a:t>
+              <a:t>5/1/2026</a:t>
             </a:fld>
             <a:endParaRPr lang="en-US"/>
           </a:p>
@@ -1039,7 +1039,7 @@
           <a:p>
             <a:fld id="{71087A05-F855-4434-8DDE-39A8542098A6}" type="datetimeFigureOut">
               <a:rPr lang="en-US" smtClean="0"/>
-              <a:t>11/21/2024</a:t>
+              <a:t>5/1/2026</a:t>
             </a:fld>
             <a:endParaRPr lang="en-US"/>
           </a:p>
@@ -1275,7 +1275,7 @@
           <a:p>
             <a:fld id="{421996D4-4A1C-4BBC-AA2B-FD5B7FC395A0}" type="datetime1">
               <a:rPr lang="en-US" smtClean="0"/>
-              <a:t>11/21/2024</a:t>
+              <a:t>5/1/2026</a:t>
             </a:fld>
             <a:endParaRPr lang="en-US"/>
           </a:p>
@@ -1578,7 +1578,7 @@
           <a:p>
             <a:fld id="{71087A05-F855-4434-8DDE-39A8542098A6}" type="datetimeFigureOut">
               <a:rPr lang="en-US" smtClean="0"/>
-              <a:t>11/21/2024</a:t>
+              <a:t>5/1/2026</a:t>
             </a:fld>
             <a:endParaRPr lang="en-US"/>
           </a:p>
@@ -1883,7 +1883,7 @@
           <a:p>
             <a:fld id="{71087A05-F855-4434-8DDE-39A8542098A6}" type="datetimeFigureOut">
               <a:rPr lang="en-US" smtClean="0"/>
-              <a:t>11/21/2024</a:t>
+              <a:t>5/1/2026</a:t>
             </a:fld>
             <a:endParaRPr lang="en-US"/>
           </a:p>
@@ -2186,7 +2186,7 @@
           <a:p>
             <a:fld id="{71087A05-F855-4434-8DDE-39A8542098A6}" type="datetimeFigureOut">
               <a:rPr lang="en-US" smtClean="0"/>
-              <a:t>11/21/2024</a:t>
+              <a:t>5/1/2026</a:t>
             </a:fld>
             <a:endParaRPr lang="en-US"/>
           </a:p>
@@ -2637,7 +2637,7 @@
           <a:p>
             <a:fld id="{71087A05-F855-4434-8DDE-39A8542098A6}" type="datetimeFigureOut">
               <a:rPr lang="en-US" smtClean="0"/>
-              <a:t>11/21/2024</a:t>
+              <a:t>5/1/2026</a:t>
             </a:fld>
             <a:endParaRPr lang="en-US"/>
           </a:p>
@@ -2810,7 +2810,7 @@
           <a:p>
             <a:fld id="{71087A05-F855-4434-8DDE-39A8542098A6}" type="datetimeFigureOut">
               <a:rPr lang="en-US" smtClean="0"/>
-              <a:t>11/21/2024</a:t>
+              <a:t>5/1/2026</a:t>
             </a:fld>
             <a:endParaRPr lang="en-US"/>
           </a:p>
@@ -2947,7 +2947,7 @@
           <a:p>
             <a:fld id="{71087A05-F855-4434-8DDE-39A8542098A6}" type="datetimeFigureOut">
               <a:rPr lang="en-US" smtClean="0"/>
-              <a:t>11/21/2024</a:t>
+              <a:t>5/1/2026</a:t>
             </a:fld>
             <a:endParaRPr lang="en-US"/>
           </a:p>
@@ -3291,7 +3291,7 @@
           <a:p>
             <a:fld id="{71087A05-F855-4434-8DDE-39A8542098A6}" type="datetimeFigureOut">
               <a:rPr lang="en-US" smtClean="0"/>
-              <a:t>11/21/2024</a:t>
+              <a:t>5/1/2026</a:t>
             </a:fld>
             <a:endParaRPr lang="en-US"/>
           </a:p>
@@ -3615,7 +3615,7 @@
           <a:p>
             <a:fld id="{71087A05-F855-4434-8DDE-39A8542098A6}" type="datetimeFigureOut">
               <a:rPr lang="en-US" smtClean="0"/>
-              <a:t>11/21/2024</a:t>
+              <a:t>5/1/2026</a:t>
             </a:fld>
             <a:endParaRPr lang="en-US"/>
           </a:p>
@@ -4566,19 +4566,12 @@
               <a:rPr lang="en-US" sz="2000" dirty="0">
                 <a:latin typeface="Lucida Console" panose="020B0609040504020204" pitchFamily="49" charset="0"/>
               </a:rPr>
-              <a:t> (2 –eq 3)  # </a:t>
-            </a:r>
-            <a:r>
-              <a:rPr lang="en-US" sz="2000" dirty="0"/>
-              <a:t>returns </a:t>
-            </a:r>
-            <a:r>
-              <a:rPr lang="en-US" sz="2000" dirty="0">
-                <a:latin typeface="Lucida Console" panose="020B0609040504020204" pitchFamily="49" charset="0"/>
-              </a:rPr>
-              <a:t>True</a:t>
-            </a:r>
-            <a:endParaRPr lang="en-US" sz="2000" dirty="0"/>
+              <a:t> (2 –eq 2)  # </a:t>
+            </a:r>
+            <a:r>
+              <a:rPr lang="en-US" sz="2000" dirty="0"/>
+              <a:t>returns True</a:t>
+            </a:r>
           </a:p>
           <a:p>
             <a:pPr marL="800100" lvl="1" indent="-342900">
